--- a/docs/presentation/GexVisor_CDay_Poster.pptx
+++ b/docs/presentation/GexVisor_CDay_Poster.pptx
@@ -1917,14 +1917,14 @@
         </p:nvSpPr>
         <p:spPr>
           <a:xfrm>
-            <a:off x="13487400" y="2743200"/>
-            <a:ext cx="30403800" cy="27432000"/>
+            <a:off x="0" y="2743200"/>
+            <a:ext cx="43891200" cy="27432000"/>
           </a:xfrm>
           <a:prstGeom prst="rect">
             <a:avLst/>
           </a:prstGeom>
           <a:solidFill>
-            <a:srgbClr val="2B2B2B"/>
+            <a:srgbClr val="FFFFFF"/>
           </a:solidFill>
           <a:ln>
             <a:noFill/>
@@ -1955,34 +1955,45 @@
       </p:sp>
       <p:sp>
         <p:nvSpPr>
-          <p:cNvPr id="50" name="TextBox 49"/>
-          <p:cNvSpPr txBox="1"/>
-          <p:nvPr/>
-        </p:nvSpPr>
-        <p:spPr>
-          <a:xfrm>
-            <a:off x="1371600" y="3200400"/>
-            <a:ext cx="10972800" cy="1828800"/>
-          </a:xfrm>
-          <a:prstGeom prst="rect">
-            <a:avLst/>
-          </a:prstGeom>
-          <a:noFill/>
-        </p:spPr>
-        <p:txBody>
-          <a:bodyPr wrap="square"/>
-          <a:lstStyle/>
-          <a:p>
-            <a:pPr algn="l"/>
-            <a:r>
-              <a:rPr sz="4400" b="1">
-                <a:solidFill>
-                  <a:srgbClr val="FFC000"/>
-                </a:solidFill>
-                <a:latin typeface="Arial"/>
-              </a:rPr>
-              <a:t>Architecture, WebAssembly, and Test Infrastructure for a .NET Financial Visualization Platform</a:t>
-            </a:r>
+          <p:cNvPr id="50" name="Rectangle 49"/>
+          <p:cNvSpPr/>
+          <p:nvPr/>
+        </p:nvSpPr>
+        <p:spPr>
+          <a:xfrm>
+            <a:off x="13487400" y="2743200"/>
+            <a:ext cx="30403800" cy="27432000"/>
+          </a:xfrm>
+          <a:prstGeom prst="rect">
+            <a:avLst/>
+          </a:prstGeom>
+          <a:solidFill>
+            <a:srgbClr val="F7F7F7"/>
+          </a:solidFill>
+          <a:ln>
+            <a:noFill/>
+          </a:ln>
+          <a:effectLst/>
+        </p:spPr>
+        <p:style>
+          <a:lnRef idx="1">
+            <a:schemeClr val="accent1"/>
+          </a:lnRef>
+          <a:fillRef idx="3">
+            <a:schemeClr val="accent1"/>
+          </a:fillRef>
+          <a:effectRef idx="2">
+            <a:schemeClr val="accent1"/>
+          </a:effectRef>
+          <a:fontRef idx="minor">
+            <a:schemeClr val="lt1"/>
+          </a:fontRef>
+        </p:style>
+        <p:txBody>
+          <a:bodyPr rtlCol="0" anchor="ctr"/>
+          <a:lstStyle/>
+          <a:p>
+            <a:pPr algn="ctr"/>
           </a:p>
         </p:txBody>
       </p:sp>
@@ -1994,8 +2005,8 @@
         </p:nvSpPr>
         <p:spPr>
           <a:xfrm>
-            <a:off x="1371600" y="5486400"/>
-            <a:ext cx="182880" cy="640080"/>
+            <a:off x="13258800" y="3200400"/>
+            <a:ext cx="73152" cy="26517600"/>
           </a:xfrm>
           <a:prstGeom prst="rect">
             <a:avLst/>
@@ -2038,8 +2049,8 @@
         </p:nvSpPr>
         <p:spPr>
           <a:xfrm>
-            <a:off x="1737360" y="5468112"/>
-            <a:ext cx="10607040" cy="640080"/>
+            <a:off x="1371600" y="3200400"/>
+            <a:ext cx="10972800" cy="1828800"/>
           </a:xfrm>
           <a:prstGeom prst="rect">
             <a:avLst/>
@@ -2052,101 +2063,58 @@
           <a:p>
             <a:pPr algn="l"/>
             <a:r>
-              <a:rPr sz="4800" b="1">
-                <a:solidFill>
-                  <a:srgbClr val="FFFFFF"/>
+              <a:rPr sz="4400" b="1">
+                <a:solidFill>
+                  <a:srgbClr val="C48E00"/>
                 </a:solidFill>
                 <a:latin typeface="Arial"/>
               </a:rPr>
-              <a:t>The Problem</a:t>
-            </a:r>
-          </a:p>
-        </p:txBody>
-      </p:sp>
-      <p:sp>
-        <p:nvSpPr>
-          <p:cNvPr id="53" name="TextBox 52"/>
-          <p:cNvSpPr txBox="1"/>
-          <p:nvPr/>
-        </p:nvSpPr>
-        <p:spPr>
-          <a:xfrm>
-            <a:off x="1554480" y="6263640"/>
-            <a:ext cx="10607040" cy="2286000"/>
-          </a:xfrm>
-          <a:prstGeom prst="rect">
-            <a:avLst/>
-          </a:prstGeom>
-          <a:noFill/>
-        </p:spPr>
-        <p:txBody>
-          <a:bodyPr wrap="square">
-            <a:spAutoFit/>
-          </a:bodyPr>
-          <a:lstStyle/>
-          <a:p>
-            <a:pPr>
-              <a:spcAft>
-                <a:spcPts val="600"/>
-              </a:spcAft>
-            </a:pPr>
-            <a:r>
-              <a:rPr sz="3400">
-                <a:solidFill>
-                  <a:srgbClr val="FFFFFF"/>
-                </a:solidFill>
-                <a:latin typeface="Arial"/>
-              </a:rPr>
-              <a:t>• Existing GEX tools: fragmented JS scripts, no tests, no CI</a:t>
-            </a:r>
-          </a:p>
-          <a:p>
-            <a:pPr>
-              <a:spcAft>
-                <a:spcPts val="600"/>
-              </a:spcAft>
-            </a:pPr>
-            <a:r>
-              <a:rPr sz="3400">
-                <a:solidFill>
-                  <a:srgbClr val="FFFFFF"/>
-                </a:solidFill>
-                <a:latin typeface="Arial"/>
-              </a:rPr>
-              <a:t>• Options visualization needs real-time + historical views</a:t>
-            </a:r>
-          </a:p>
-          <a:p>
-            <a:pPr>
-              <a:spcAft>
-                <a:spcPts val="600"/>
-              </a:spcAft>
-            </a:pPr>
-            <a:r>
-              <a:rPr sz="3400">
-                <a:solidFill>
-                  <a:srgbClr val="FFFFFF"/>
-                </a:solidFill>
-                <a:latin typeface="Arial"/>
-              </a:rPr>
-              <a:t>• Research workflows disconnected from analysis tooling</a:t>
-            </a:r>
-          </a:p>
-          <a:p>
-            <a:pPr>
-              <a:spcAft>
-                <a:spcPts val="600"/>
-              </a:spcAft>
-            </a:pPr>
-            <a:r>
-              <a:rPr sz="3400">
-                <a:solidFill>
-                  <a:srgbClr val="FFFFFF"/>
-                </a:solidFill>
-                <a:latin typeface="Arial"/>
-              </a:rPr>
-              <a:t>• No cross-platform solution (browser-based needed)</a:t>
-            </a:r>
+              <a:t>Architecture, WebAssembly, and Test Infrastructure for a .NET Financial Visualization Platform</a:t>
+            </a:r>
+          </a:p>
+        </p:txBody>
+      </p:sp>
+      <p:sp>
+        <p:nvSpPr>
+          <p:cNvPr id="53" name="Rectangle 52"/>
+          <p:cNvSpPr/>
+          <p:nvPr/>
+        </p:nvSpPr>
+        <p:spPr>
+          <a:xfrm>
+            <a:off x="1371600" y="5486400"/>
+            <a:ext cx="10972800" cy="685800"/>
+          </a:xfrm>
+          <a:prstGeom prst="rect">
+            <a:avLst/>
+          </a:prstGeom>
+          <a:solidFill>
+            <a:srgbClr val="1A1A1A"/>
+          </a:solidFill>
+          <a:ln>
+            <a:noFill/>
+          </a:ln>
+          <a:effectLst/>
+        </p:spPr>
+        <p:style>
+          <a:lnRef idx="1">
+            <a:schemeClr val="accent1"/>
+          </a:lnRef>
+          <a:fillRef idx="3">
+            <a:schemeClr val="accent1"/>
+          </a:fillRef>
+          <a:effectRef idx="2">
+            <a:schemeClr val="accent1"/>
+          </a:effectRef>
+          <a:fontRef idx="minor">
+            <a:schemeClr val="lt1"/>
+          </a:fontRef>
+        </p:style>
+        <p:txBody>
+          <a:bodyPr rtlCol="0" anchor="ctr"/>
+          <a:lstStyle/>
+          <a:p>
+            <a:pPr algn="ctr"/>
           </a:p>
         </p:txBody>
       </p:sp>
@@ -2158,8 +2126,8 @@
         </p:nvSpPr>
         <p:spPr>
           <a:xfrm>
-            <a:off x="1371600" y="9189720"/>
-            <a:ext cx="182880" cy="640080"/>
+            <a:off x="1371600" y="5486400"/>
+            <a:ext cx="182880" cy="685800"/>
           </a:xfrm>
           <a:prstGeom prst="rect">
             <a:avLst/>
@@ -2202,8 +2170,8 @@
         </p:nvSpPr>
         <p:spPr>
           <a:xfrm>
-            <a:off x="1737360" y="9171432"/>
-            <a:ext cx="10607040" cy="640080"/>
+            <a:off x="1737360" y="5532120"/>
+            <a:ext cx="10515600" cy="594360"/>
           </a:xfrm>
           <a:prstGeom prst="rect">
             <a:avLst/>
@@ -2216,39 +2184,123 @@
           <a:p>
             <a:pPr algn="l"/>
             <a:r>
-              <a:rPr sz="4800" b="1">
+              <a:rPr sz="4400" b="1">
                 <a:solidFill>
                   <a:srgbClr val="FFFFFF"/>
                 </a:solidFill>
                 <a:latin typeface="Arial"/>
               </a:rPr>
-              <a:t>System Architecture</a:t>
-            </a:r>
-          </a:p>
-        </p:txBody>
-      </p:sp>
-      <p:sp>
-        <p:nvSpPr>
-          <p:cNvPr id="56" name="Rounded Rectangle 55"/>
+              <a:t>The Problem</a:t>
+            </a:r>
+          </a:p>
+        </p:txBody>
+      </p:sp>
+      <p:sp>
+        <p:nvSpPr>
+          <p:cNvPr id="56" name="TextBox 55"/>
+          <p:cNvSpPr txBox="1"/>
+          <p:nvPr/>
+        </p:nvSpPr>
+        <p:spPr>
+          <a:xfrm>
+            <a:off x="1554480" y="6309360"/>
+            <a:ext cx="10607040" cy="2286000"/>
+          </a:xfrm>
+          <a:prstGeom prst="rect">
+            <a:avLst/>
+          </a:prstGeom>
+          <a:noFill/>
+        </p:spPr>
+        <p:txBody>
+          <a:bodyPr wrap="square">
+            <a:spAutoFit/>
+          </a:bodyPr>
+          <a:lstStyle/>
+          <a:p>
+            <a:pPr>
+              <a:spcAft>
+                <a:spcPts val="600"/>
+              </a:spcAft>
+            </a:pPr>
+            <a:r>
+              <a:rPr sz="3400">
+                <a:solidFill>
+                  <a:srgbClr val="2D2D2D"/>
+                </a:solidFill>
+                <a:latin typeface="Arial"/>
+              </a:rPr>
+              <a:t>• Existing GEX tools: fragmented JS scripts, no tests, no CI</a:t>
+            </a:r>
+          </a:p>
+          <a:p>
+            <a:pPr>
+              <a:spcAft>
+                <a:spcPts val="600"/>
+              </a:spcAft>
+            </a:pPr>
+            <a:r>
+              <a:rPr sz="3400">
+                <a:solidFill>
+                  <a:srgbClr val="2D2D2D"/>
+                </a:solidFill>
+                <a:latin typeface="Arial"/>
+              </a:rPr>
+              <a:t>• Options visualization needs real-time + historical views</a:t>
+            </a:r>
+          </a:p>
+          <a:p>
+            <a:pPr>
+              <a:spcAft>
+                <a:spcPts val="600"/>
+              </a:spcAft>
+            </a:pPr>
+            <a:r>
+              <a:rPr sz="3400">
+                <a:solidFill>
+                  <a:srgbClr val="2D2D2D"/>
+                </a:solidFill>
+                <a:latin typeface="Arial"/>
+              </a:rPr>
+              <a:t>• Research workflows disconnected from analysis tooling</a:t>
+            </a:r>
+          </a:p>
+          <a:p>
+            <a:pPr>
+              <a:spcAft>
+                <a:spcPts val="600"/>
+              </a:spcAft>
+            </a:pPr>
+            <a:r>
+              <a:rPr sz="3400">
+                <a:solidFill>
+                  <a:srgbClr val="2D2D2D"/>
+                </a:solidFill>
+                <a:latin typeface="Arial"/>
+              </a:rPr>
+              <a:t>• No cross-platform solution (browser-based needed)</a:t>
+            </a:r>
+          </a:p>
+        </p:txBody>
+      </p:sp>
+      <p:sp>
+        <p:nvSpPr>
+          <p:cNvPr id="57" name="Rectangle 56"/>
           <p:cNvSpPr/>
           <p:nvPr/>
         </p:nvSpPr>
         <p:spPr>
           <a:xfrm>
-            <a:off x="1371600" y="9966960"/>
-            <a:ext cx="10972800" cy="5486400"/>
-          </a:xfrm>
-          <a:prstGeom prst="roundRect">
+            <a:off x="1371600" y="9235440"/>
+            <a:ext cx="10972800" cy="685800"/>
+          </a:xfrm>
+          <a:prstGeom prst="rect">
             <a:avLst/>
           </a:prstGeom>
           <a:solidFill>
-            <a:srgbClr val="E8E8E8"/>
+            <a:srgbClr val="1A1A1A"/>
           </a:solidFill>
-          <a:ln w="25400">
-            <a:solidFill>
-              <a:srgbClr val="666666"/>
-            </a:solidFill>
-            <a:prstDash val="dash"/>
+          <a:ln>
+            <a:noFill/>
           </a:ln>
           <a:effectLst/>
         </p:spPr>
@@ -2276,80 +2328,14 @@
       </p:sp>
       <p:sp>
         <p:nvSpPr>
-          <p:cNvPr id="57" name="TextBox 56"/>
-          <p:cNvSpPr txBox="1"/>
-          <p:nvPr/>
-        </p:nvSpPr>
-        <p:spPr>
-          <a:xfrm>
-            <a:off x="1371600" y="12298680"/>
-            <a:ext cx="10972800" cy="548640"/>
-          </a:xfrm>
-          <a:prstGeom prst="rect">
-            <a:avLst/>
-          </a:prstGeom>
-          <a:noFill/>
-        </p:spPr>
-        <p:txBody>
-          <a:bodyPr wrap="square"/>
-          <a:lstStyle/>
-          <a:p>
-            <a:pPr algn="ctr"/>
-            <a:r>
-              <a:rPr sz="3600" b="1">
-                <a:solidFill>
-                  <a:srgbClr val="666666"/>
-                </a:solidFill>
-                <a:latin typeface="Arial"/>
-              </a:rPr>
-              <a:t>ARCHITECTURE DIAGRAM</a:t>
-            </a:r>
-          </a:p>
-        </p:txBody>
-      </p:sp>
-      <p:sp>
-        <p:nvSpPr>
-          <p:cNvPr id="58" name="TextBox 57"/>
-          <p:cNvSpPr txBox="1"/>
-          <p:nvPr/>
-        </p:nvSpPr>
-        <p:spPr>
-          <a:xfrm>
-            <a:off x="1371600" y="12893040"/>
-            <a:ext cx="10972800" cy="457200"/>
-          </a:xfrm>
-          <a:prstGeom prst="rect">
-            <a:avLst/>
-          </a:prstGeom>
-          <a:noFill/>
-        </p:spPr>
-        <p:txBody>
-          <a:bodyPr wrap="square"/>
-          <a:lstStyle/>
-          <a:p>
-            <a:pPr algn="ctr"/>
-            <a:r>
-              <a:rPr sz="2200" b="0">
-                <a:solidFill>
-                  <a:srgbClr val="666666"/>
-                </a:solidFill>
-                <a:latin typeface="Arial"/>
-              </a:rPr>
-              <a:t>3-tier: UI → Core → API</a:t>
-            </a:r>
-          </a:p>
-        </p:txBody>
-      </p:sp>
-      <p:sp>
-        <p:nvSpPr>
-          <p:cNvPr id="59" name="Rectangle 58"/>
+          <p:cNvPr id="58" name="Rectangle 57"/>
           <p:cNvSpPr/>
           <p:nvPr/>
         </p:nvSpPr>
         <p:spPr>
           <a:xfrm>
-            <a:off x="1371600" y="15727680"/>
-            <a:ext cx="182880" cy="640080"/>
+            <a:off x="1371600" y="9235440"/>
+            <a:ext cx="182880" cy="685800"/>
           </a:xfrm>
           <a:prstGeom prst="rect">
             <a:avLst/>
@@ -2386,14 +2372,14 @@
       </p:sp>
       <p:sp>
         <p:nvSpPr>
-          <p:cNvPr id="60" name="TextBox 59"/>
+          <p:cNvPr id="59" name="TextBox 58"/>
           <p:cNvSpPr txBox="1"/>
           <p:nvPr/>
         </p:nvSpPr>
         <p:spPr>
           <a:xfrm>
-            <a:off x="1737360" y="15709392"/>
-            <a:ext cx="10607040" cy="640080"/>
+            <a:off x="1737360" y="9281160"/>
+            <a:ext cx="10515600" cy="594360"/>
           </a:xfrm>
           <a:prstGeom prst="rect">
             <a:avLst/>
@@ -2406,14 +2392,61 @@
           <a:p>
             <a:pPr algn="l"/>
             <a:r>
-              <a:rPr sz="4800" b="1">
+              <a:rPr sz="4400" b="1">
                 <a:solidFill>
                   <a:srgbClr val="FFFFFF"/>
                 </a:solidFill>
                 <a:latin typeface="Arial"/>
               </a:rPr>
-              <a:t>Technology Stack</a:t>
-            </a:r>
+              <a:t>System Architecture</a:t>
+            </a:r>
+          </a:p>
+        </p:txBody>
+      </p:sp>
+      <p:sp>
+        <p:nvSpPr>
+          <p:cNvPr id="60" name="Rounded Rectangle 59"/>
+          <p:cNvSpPr/>
+          <p:nvPr/>
+        </p:nvSpPr>
+        <p:spPr>
+          <a:xfrm>
+            <a:off x="1371600" y="10058400"/>
+            <a:ext cx="10972800" cy="5486400"/>
+          </a:xfrm>
+          <a:prstGeom prst="roundRect">
+            <a:avLst/>
+          </a:prstGeom>
+          <a:solidFill>
+            <a:srgbClr val="ECECEC"/>
+          </a:solidFill>
+          <a:ln w="19050">
+            <a:solidFill>
+              <a:srgbClr val="AAAAAA"/>
+            </a:solidFill>
+            <a:prstDash val="dash"/>
+          </a:ln>
+          <a:effectLst/>
+        </p:spPr>
+        <p:style>
+          <a:lnRef idx="1">
+            <a:schemeClr val="accent1"/>
+          </a:lnRef>
+          <a:fillRef idx="3">
+            <a:schemeClr val="accent1"/>
+          </a:fillRef>
+          <a:effectRef idx="2">
+            <a:schemeClr val="accent1"/>
+          </a:effectRef>
+          <a:fontRef idx="minor">
+            <a:schemeClr val="lt1"/>
+          </a:fontRef>
+        </p:style>
+        <p:txBody>
+          <a:bodyPr rtlCol="0" anchor="ctr"/>
+          <a:lstStyle/>
+          <a:p>
+            <a:pPr algn="ctr"/>
           </a:p>
         </p:txBody>
       </p:sp>
@@ -2425,8 +2458,8 @@
         </p:nvSpPr>
         <p:spPr>
           <a:xfrm>
-            <a:off x="1554480" y="16504920"/>
-            <a:ext cx="10607040" cy="3383279"/>
+            <a:off x="1371600" y="12390120"/>
+            <a:ext cx="10972800" cy="548640"/>
           </a:xfrm>
           <a:prstGeom prst="rect">
             <a:avLst/>
@@ -2434,118 +2467,109 @@
           <a:noFill/>
         </p:spPr>
         <p:txBody>
-          <a:bodyPr wrap="square">
-            <a:spAutoFit/>
-          </a:bodyPr>
-          <a:lstStyle/>
-          <a:p>
-            <a:pPr>
-              <a:spcAft>
-                <a:spcPts val="600"/>
-              </a:spcAft>
-            </a:pPr>
-            <a:r>
-              <a:rPr sz="3200">
-                <a:solidFill>
-                  <a:srgbClr val="FFFFFF"/>
+          <a:bodyPr wrap="square"/>
+          <a:lstStyle/>
+          <a:p>
+            <a:pPr algn="ctr"/>
+            <a:r>
+              <a:rPr sz="3600" b="1">
+                <a:solidFill>
+                  <a:srgbClr val="AAAAAA"/>
                 </a:solidFill>
                 <a:latin typeface="Arial"/>
               </a:rPr>
-              <a:t>• .NET 10 / Blazor WebAssembly (runs in browser via WASM)</a:t>
-            </a:r>
-          </a:p>
-          <a:p>
-            <a:pPr>
-              <a:spcAft>
-                <a:spcPts val="600"/>
-              </a:spcAft>
-            </a:pPr>
-            <a:r>
-              <a:rPr sz="3200">
-                <a:solidFill>
-                  <a:srgbClr val="FFFFFF"/>
+              <a:t>ARCHITECTURE DIAGRAM</a:t>
+            </a:r>
+          </a:p>
+        </p:txBody>
+      </p:sp>
+      <p:sp>
+        <p:nvSpPr>
+          <p:cNvPr id="62" name="TextBox 61"/>
+          <p:cNvSpPr txBox="1"/>
+          <p:nvPr/>
+        </p:nvSpPr>
+        <p:spPr>
+          <a:xfrm>
+            <a:off x="1371600" y="12984480"/>
+            <a:ext cx="10972800" cy="457200"/>
+          </a:xfrm>
+          <a:prstGeom prst="rect">
+            <a:avLst/>
+          </a:prstGeom>
+          <a:noFill/>
+        </p:spPr>
+        <p:txBody>
+          <a:bodyPr wrap="square"/>
+          <a:lstStyle/>
+          <a:p>
+            <a:pPr algn="ctr"/>
+            <a:r>
+              <a:rPr sz="2200" b="0">
+                <a:solidFill>
+                  <a:srgbClr val="AAAAAA"/>
                 </a:solidFill>
                 <a:latin typeface="Arial"/>
               </a:rPr>
-              <a:t>• C# throughout — replaced JS/Python prototype entirely</a:t>
-            </a:r>
-          </a:p>
-          <a:p>
-            <a:pPr>
-              <a:spcAft>
-                <a:spcPts val="600"/>
-              </a:spcAft>
-            </a:pPr>
-            <a:r>
-              <a:rPr sz="3200">
-                <a:solidFill>
-                  <a:srgbClr val="FFFFFF"/>
-                </a:solidFill>
-                <a:latin typeface="Arial"/>
-              </a:rPr>
-              <a:t>• ApexCharts for interactive financial visualizations</a:t>
-            </a:r>
-          </a:p>
-          <a:p>
-            <a:pPr>
-              <a:spcAft>
-                <a:spcPts val="600"/>
-              </a:spcAft>
-            </a:pPr>
-            <a:r>
-              <a:rPr sz="3200">
-                <a:solidFill>
-                  <a:srgbClr val="FFFFFF"/>
-                </a:solidFill>
-                <a:latin typeface="Arial"/>
-              </a:rPr>
-              <a:t>• SQLite caching layer for market data persistence</a:t>
-            </a:r>
-          </a:p>
-          <a:p>
-            <a:pPr>
-              <a:spcAft>
-                <a:spcPts val="600"/>
-              </a:spcAft>
-            </a:pPr>
-            <a:r>
-              <a:rPr sz="3200">
-                <a:solidFill>
-                  <a:srgbClr val="FFFFFF"/>
-                </a:solidFill>
-                <a:latin typeface="Arial"/>
-              </a:rPr>
-              <a:t>• ASP.NET Core API with options chain services</a:t>
-            </a:r>
-          </a:p>
-          <a:p>
-            <a:pPr>
-              <a:spcAft>
-                <a:spcPts val="600"/>
-              </a:spcAft>
-            </a:pPr>
-            <a:r>
-              <a:rPr sz="3200">
-                <a:solidFill>
-                  <a:srgbClr val="FFFFFF"/>
-                </a:solidFill>
-                <a:latin typeface="Arial"/>
-              </a:rPr>
-              <a:t>• GitHub Actions CI/CD + Husky.Net pre-commit hooks</a:t>
-            </a:r>
-          </a:p>
-        </p:txBody>
-      </p:sp>
-      <p:sp>
-        <p:nvSpPr>
-          <p:cNvPr id="62" name="Rectangle 61"/>
+              <a:t>3-tier: UI → Core → API</a:t>
+            </a:r>
+          </a:p>
+        </p:txBody>
+      </p:sp>
+      <p:sp>
+        <p:nvSpPr>
+          <p:cNvPr id="63" name="Rectangle 62"/>
           <p:cNvSpPr/>
           <p:nvPr/>
         </p:nvSpPr>
         <p:spPr>
           <a:xfrm>
-            <a:off x="14173200" y="3200400"/>
-            <a:ext cx="182880" cy="640080"/>
+            <a:off x="1371600" y="15819120"/>
+            <a:ext cx="10972800" cy="685800"/>
+          </a:xfrm>
+          <a:prstGeom prst="rect">
+            <a:avLst/>
+          </a:prstGeom>
+          <a:solidFill>
+            <a:srgbClr val="1A1A1A"/>
+          </a:solidFill>
+          <a:ln>
+            <a:noFill/>
+          </a:ln>
+          <a:effectLst/>
+        </p:spPr>
+        <p:style>
+          <a:lnRef idx="1">
+            <a:schemeClr val="accent1"/>
+          </a:lnRef>
+          <a:fillRef idx="3">
+            <a:schemeClr val="accent1"/>
+          </a:fillRef>
+          <a:effectRef idx="2">
+            <a:schemeClr val="accent1"/>
+          </a:effectRef>
+          <a:fontRef idx="minor">
+            <a:schemeClr val="lt1"/>
+          </a:fontRef>
+        </p:style>
+        <p:txBody>
+          <a:bodyPr rtlCol="0" anchor="ctr"/>
+          <a:lstStyle/>
+          <a:p>
+            <a:pPr algn="ctr"/>
+          </a:p>
+        </p:txBody>
+      </p:sp>
+      <p:sp>
+        <p:nvSpPr>
+          <p:cNvPr id="64" name="Rectangle 63"/>
+          <p:cNvSpPr/>
+          <p:nvPr/>
+        </p:nvSpPr>
+        <p:spPr>
+          <a:xfrm>
+            <a:off x="1371600" y="15819120"/>
+            <a:ext cx="182880" cy="685800"/>
           </a:xfrm>
           <a:prstGeom prst="rect">
             <a:avLst/>
@@ -2582,14 +2606,14 @@
       </p:sp>
       <p:sp>
         <p:nvSpPr>
-          <p:cNvPr id="63" name="TextBox 62"/>
+          <p:cNvPr id="65" name="TextBox 64"/>
           <p:cNvSpPr txBox="1"/>
           <p:nvPr/>
         </p:nvSpPr>
         <p:spPr>
           <a:xfrm>
-            <a:off x="14538960" y="3182112"/>
-            <a:ext cx="13533120" cy="640080"/>
+            <a:off x="1737360" y="15864840"/>
+            <a:ext cx="10515600" cy="594360"/>
           </a:xfrm>
           <a:prstGeom prst="rect">
             <a:avLst/>
@@ -2602,39 +2626,155 @@
           <a:p>
             <a:pPr algn="l"/>
             <a:r>
-              <a:rPr sz="4800" b="1">
+              <a:rPr sz="4400" b="1">
                 <a:solidFill>
                   <a:srgbClr val="FFFFFF"/>
                 </a:solidFill>
                 <a:latin typeface="Arial"/>
               </a:rPr>
-              <a:t>GEX Visualizer</a:t>
-            </a:r>
-          </a:p>
-        </p:txBody>
-      </p:sp>
-      <p:sp>
-        <p:nvSpPr>
-          <p:cNvPr id="64" name="Rounded Rectangle 63"/>
+              <a:t>Technology Stack</a:t>
+            </a:r>
+          </a:p>
+        </p:txBody>
+      </p:sp>
+      <p:sp>
+        <p:nvSpPr>
+          <p:cNvPr id="66" name="TextBox 65"/>
+          <p:cNvSpPr txBox="1"/>
+          <p:nvPr/>
+        </p:nvSpPr>
+        <p:spPr>
+          <a:xfrm>
+            <a:off x="1554480" y="16642080"/>
+            <a:ext cx="10607040" cy="3383279"/>
+          </a:xfrm>
+          <a:prstGeom prst="rect">
+            <a:avLst/>
+          </a:prstGeom>
+          <a:noFill/>
+        </p:spPr>
+        <p:txBody>
+          <a:bodyPr wrap="square">
+            <a:spAutoFit/>
+          </a:bodyPr>
+          <a:lstStyle/>
+          <a:p>
+            <a:pPr>
+              <a:spcAft>
+                <a:spcPts val="600"/>
+              </a:spcAft>
+            </a:pPr>
+            <a:r>
+              <a:rPr sz="3200">
+                <a:solidFill>
+                  <a:srgbClr val="2D2D2D"/>
+                </a:solidFill>
+                <a:latin typeface="Arial"/>
+              </a:rPr>
+              <a:t>• .NET 10 / Blazor WebAssembly (runs in browser via WASM)</a:t>
+            </a:r>
+          </a:p>
+          <a:p>
+            <a:pPr>
+              <a:spcAft>
+                <a:spcPts val="600"/>
+              </a:spcAft>
+            </a:pPr>
+            <a:r>
+              <a:rPr sz="3200">
+                <a:solidFill>
+                  <a:srgbClr val="2D2D2D"/>
+                </a:solidFill>
+                <a:latin typeface="Arial"/>
+              </a:rPr>
+              <a:t>• C# throughout — replaced JS/Python prototype entirely</a:t>
+            </a:r>
+          </a:p>
+          <a:p>
+            <a:pPr>
+              <a:spcAft>
+                <a:spcPts val="600"/>
+              </a:spcAft>
+            </a:pPr>
+            <a:r>
+              <a:rPr sz="3200">
+                <a:solidFill>
+                  <a:srgbClr val="2D2D2D"/>
+                </a:solidFill>
+                <a:latin typeface="Arial"/>
+              </a:rPr>
+              <a:t>• ApexCharts for interactive financial visualizations</a:t>
+            </a:r>
+          </a:p>
+          <a:p>
+            <a:pPr>
+              <a:spcAft>
+                <a:spcPts val="600"/>
+              </a:spcAft>
+            </a:pPr>
+            <a:r>
+              <a:rPr sz="3200">
+                <a:solidFill>
+                  <a:srgbClr val="2D2D2D"/>
+                </a:solidFill>
+                <a:latin typeface="Arial"/>
+              </a:rPr>
+              <a:t>• SQLite caching layer for market data persistence</a:t>
+            </a:r>
+          </a:p>
+          <a:p>
+            <a:pPr>
+              <a:spcAft>
+                <a:spcPts val="600"/>
+              </a:spcAft>
+            </a:pPr>
+            <a:r>
+              <a:rPr sz="3200">
+                <a:solidFill>
+                  <a:srgbClr val="2D2D2D"/>
+                </a:solidFill>
+                <a:latin typeface="Arial"/>
+              </a:rPr>
+              <a:t>• ASP.NET Core API with options chain services</a:t>
+            </a:r>
+          </a:p>
+          <a:p>
+            <a:pPr>
+              <a:spcAft>
+                <a:spcPts val="600"/>
+              </a:spcAft>
+            </a:pPr>
+            <a:r>
+              <a:rPr sz="3200">
+                <a:solidFill>
+                  <a:srgbClr val="2D2D2D"/>
+                </a:solidFill>
+                <a:latin typeface="Arial"/>
+              </a:rPr>
+              <a:t>• GitHub Actions CI/CD + Husky.Net pre-commit hooks</a:t>
+            </a:r>
+          </a:p>
+        </p:txBody>
+      </p:sp>
+      <p:sp>
+        <p:nvSpPr>
+          <p:cNvPr id="67" name="Rectangle 66"/>
           <p:cNvSpPr/>
           <p:nvPr/>
         </p:nvSpPr>
         <p:spPr>
           <a:xfrm>
-            <a:off x="14173200" y="3977640"/>
-            <a:ext cx="13898880" cy="5943600"/>
-          </a:xfrm>
-          <a:prstGeom prst="roundRect">
+            <a:off x="14173200" y="3200400"/>
+            <a:ext cx="13898880" cy="685800"/>
+          </a:xfrm>
+          <a:prstGeom prst="rect">
             <a:avLst/>
           </a:prstGeom>
           <a:solidFill>
-            <a:srgbClr val="E8E8E8"/>
+            <a:srgbClr val="1A1A1A"/>
           </a:solidFill>
-          <a:ln w="25400">
-            <a:solidFill>
-              <a:srgbClr val="666666"/>
-            </a:solidFill>
-            <a:prstDash val="dash"/>
+          <a:ln>
+            <a:noFill/>
           </a:ln>
           <a:effectLst/>
         </p:spPr>
@@ -2662,80 +2802,14 @@
       </p:sp>
       <p:sp>
         <p:nvSpPr>
-          <p:cNvPr id="65" name="TextBox 64"/>
-          <p:cNvSpPr txBox="1"/>
-          <p:nvPr/>
-        </p:nvSpPr>
-        <p:spPr>
-          <a:xfrm>
-            <a:off x="14173200" y="6537960"/>
-            <a:ext cx="13898880" cy="548640"/>
-          </a:xfrm>
-          <a:prstGeom prst="rect">
-            <a:avLst/>
-          </a:prstGeom>
-          <a:noFill/>
-        </p:spPr>
-        <p:txBody>
-          <a:bodyPr wrap="square"/>
-          <a:lstStyle/>
-          <a:p>
-            <a:pPr algn="ctr"/>
-            <a:r>
-              <a:rPr sz="3600" b="1">
-                <a:solidFill>
-                  <a:srgbClr val="666666"/>
-                </a:solidFill>
-                <a:latin typeface="Arial"/>
-              </a:rPr>
-              <a:t>GEX VISUALIZER</a:t>
-            </a:r>
-          </a:p>
-        </p:txBody>
-      </p:sp>
-      <p:sp>
-        <p:nvSpPr>
-          <p:cNvPr id="66" name="TextBox 65"/>
-          <p:cNvSpPr txBox="1"/>
-          <p:nvPr/>
-        </p:nvSpPr>
-        <p:spPr>
-          <a:xfrm>
-            <a:off x="14173200" y="7132320"/>
-            <a:ext cx="13898880" cy="457200"/>
-          </a:xfrm>
-          <a:prstGeom prst="rect">
-            <a:avLst/>
-          </a:prstGeom>
-          <a:noFill/>
-        </p:spPr>
-        <p:txBody>
-          <a:bodyPr wrap="square"/>
-          <a:lstStyle/>
-          <a:p>
-            <a:pPr algn="ctr"/>
-            <a:r>
-              <a:rPr sz="2200" b="0">
-                <a:solidFill>
-                  <a:srgbClr val="666666"/>
-                </a:solidFill>
-                <a:latin typeface="Arial"/>
-              </a:rPr>
-              <a:t>Interactive chart + regime timeline + annotations</a:t>
-            </a:r>
-          </a:p>
-        </p:txBody>
-      </p:sp>
-      <p:sp>
-        <p:nvSpPr>
-          <p:cNvPr id="67" name="Rectangle 66"/>
+          <p:cNvPr id="68" name="Rectangle 67"/>
           <p:cNvSpPr/>
           <p:nvPr/>
         </p:nvSpPr>
         <p:spPr>
           <a:xfrm>
-            <a:off x="14173200" y="10287000"/>
-            <a:ext cx="182880" cy="640080"/>
+            <a:off x="14173200" y="3200400"/>
+            <a:ext cx="182880" cy="685800"/>
           </a:xfrm>
           <a:prstGeom prst="rect">
             <a:avLst/>
@@ -2772,14 +2846,14 @@
       </p:sp>
       <p:sp>
         <p:nvSpPr>
-          <p:cNvPr id="68" name="TextBox 67"/>
+          <p:cNvPr id="69" name="TextBox 68"/>
           <p:cNvSpPr txBox="1"/>
           <p:nvPr/>
         </p:nvSpPr>
         <p:spPr>
           <a:xfrm>
-            <a:off x="14538960" y="10268712"/>
-            <a:ext cx="13533120" cy="640080"/>
+            <a:off x="14538960" y="3246120"/>
+            <a:ext cx="13441680" cy="594360"/>
           </a:xfrm>
           <a:prstGeom prst="rect">
             <a:avLst/>
@@ -2792,37 +2866,37 @@
           <a:p>
             <a:pPr algn="l"/>
             <a:r>
-              <a:rPr sz="4800" b="1">
+              <a:rPr sz="4400" b="1">
                 <a:solidFill>
                   <a:srgbClr val="FFFFFF"/>
                 </a:solidFill>
                 <a:latin typeface="Arial"/>
               </a:rPr>
-              <a:t>Research Notebook</a:t>
-            </a:r>
-          </a:p>
-        </p:txBody>
-      </p:sp>
-      <p:sp>
-        <p:nvSpPr>
-          <p:cNvPr id="69" name="Rounded Rectangle 68"/>
+              <a:t>GEX Visualizer</a:t>
+            </a:r>
+          </a:p>
+        </p:txBody>
+      </p:sp>
+      <p:sp>
+        <p:nvSpPr>
+          <p:cNvPr id="70" name="Rounded Rectangle 69"/>
           <p:cNvSpPr/>
           <p:nvPr/>
         </p:nvSpPr>
         <p:spPr>
           <a:xfrm>
-            <a:off x="14173200" y="11064240"/>
-            <a:ext cx="13898880" cy="5486400"/>
+            <a:off x="14173200" y="4023360"/>
+            <a:ext cx="13898880" cy="5943600"/>
           </a:xfrm>
           <a:prstGeom prst="roundRect">
             <a:avLst/>
           </a:prstGeom>
           <a:solidFill>
-            <a:srgbClr val="E8E8E8"/>
+            <a:srgbClr val="ECECEC"/>
           </a:solidFill>
-          <a:ln w="25400">
+          <a:ln w="19050">
             <a:solidFill>
-              <a:srgbClr val="666666"/>
+              <a:srgbClr val="AAAAAA"/>
             </a:solidFill>
             <a:prstDash val="dash"/>
           </a:ln>
@@ -2852,46 +2926,46 @@
       </p:sp>
       <p:sp>
         <p:nvSpPr>
-          <p:cNvPr id="70" name="TextBox 69"/>
-          <p:cNvSpPr txBox="1"/>
-          <p:nvPr/>
-        </p:nvSpPr>
-        <p:spPr>
-          <a:xfrm>
-            <a:off x="14173200" y="13395960"/>
-            <a:ext cx="13898880" cy="548640"/>
-          </a:xfrm>
-          <a:prstGeom prst="rect">
-            <a:avLst/>
-          </a:prstGeom>
-          <a:noFill/>
-        </p:spPr>
-        <p:txBody>
-          <a:bodyPr wrap="square"/>
-          <a:lstStyle/>
-          <a:p>
-            <a:pPr algn="ctr"/>
-            <a:r>
-              <a:rPr sz="3600" b="1">
-                <a:solidFill>
-                  <a:srgbClr val="666666"/>
-                </a:solidFill>
-                <a:latin typeface="Arial"/>
-              </a:rPr>
-              <a:t>RESEARCH NOTEBOOK</a:t>
-            </a:r>
-          </a:p>
-        </p:txBody>
-      </p:sp>
-      <p:sp>
-        <p:nvSpPr>
           <p:cNvPr id="71" name="TextBox 70"/>
           <p:cNvSpPr txBox="1"/>
           <p:nvPr/>
         </p:nvSpPr>
         <p:spPr>
           <a:xfrm>
-            <a:off x="14173200" y="13990320"/>
+            <a:off x="14173200" y="6583680"/>
+            <a:ext cx="13898880" cy="548640"/>
+          </a:xfrm>
+          <a:prstGeom prst="rect">
+            <a:avLst/>
+          </a:prstGeom>
+          <a:noFill/>
+        </p:spPr>
+        <p:txBody>
+          <a:bodyPr wrap="square"/>
+          <a:lstStyle/>
+          <a:p>
+            <a:pPr algn="ctr"/>
+            <a:r>
+              <a:rPr sz="3600" b="1">
+                <a:solidFill>
+                  <a:srgbClr val="AAAAAA"/>
+                </a:solidFill>
+                <a:latin typeface="Arial"/>
+              </a:rPr>
+              <a:t>GEX VISUALIZER</a:t>
+            </a:r>
+          </a:p>
+        </p:txBody>
+      </p:sp>
+      <p:sp>
+        <p:nvSpPr>
+          <p:cNvPr id="72" name="TextBox 71"/>
+          <p:cNvSpPr txBox="1"/>
+          <p:nvPr/>
+        </p:nvSpPr>
+        <p:spPr>
+          <a:xfrm>
+            <a:off x="14173200" y="7178040"/>
             <a:ext cx="13898880" cy="457200"/>
           </a:xfrm>
           <a:prstGeom prst="rect">
@@ -2907,25 +2981,69 @@
             <a:r>
               <a:rPr sz="2200" b="0">
                 <a:solidFill>
-                  <a:srgbClr val="666666"/>
+                  <a:srgbClr val="AAAAAA"/>
                 </a:solidFill>
                 <a:latin typeface="Arial"/>
               </a:rPr>
-              <a:t>KDD process tracking + complexity radar</a:t>
-            </a:r>
-          </a:p>
-        </p:txBody>
-      </p:sp>
-      <p:sp>
-        <p:nvSpPr>
-          <p:cNvPr id="72" name="Rectangle 71"/>
+              <a:t>Interactive chart + regime timeline + annotations</a:t>
+            </a:r>
+          </a:p>
+        </p:txBody>
+      </p:sp>
+      <p:sp>
+        <p:nvSpPr>
+          <p:cNvPr id="73" name="Rectangle 72"/>
           <p:cNvSpPr/>
           <p:nvPr/>
         </p:nvSpPr>
         <p:spPr>
           <a:xfrm>
-            <a:off x="14173200" y="16916400"/>
-            <a:ext cx="182880" cy="640080"/>
+            <a:off x="14173200" y="10332720"/>
+            <a:ext cx="13898880" cy="685800"/>
+          </a:xfrm>
+          <a:prstGeom prst="rect">
+            <a:avLst/>
+          </a:prstGeom>
+          <a:solidFill>
+            <a:srgbClr val="1A1A1A"/>
+          </a:solidFill>
+          <a:ln>
+            <a:noFill/>
+          </a:ln>
+          <a:effectLst/>
+        </p:spPr>
+        <p:style>
+          <a:lnRef idx="1">
+            <a:schemeClr val="accent1"/>
+          </a:lnRef>
+          <a:fillRef idx="3">
+            <a:schemeClr val="accent1"/>
+          </a:fillRef>
+          <a:effectRef idx="2">
+            <a:schemeClr val="accent1"/>
+          </a:effectRef>
+          <a:fontRef idx="minor">
+            <a:schemeClr val="lt1"/>
+          </a:fontRef>
+        </p:style>
+        <p:txBody>
+          <a:bodyPr rtlCol="0" anchor="ctr"/>
+          <a:lstStyle/>
+          <a:p>
+            <a:pPr algn="ctr"/>
+          </a:p>
+        </p:txBody>
+      </p:sp>
+      <p:sp>
+        <p:nvSpPr>
+          <p:cNvPr id="74" name="Rectangle 73"/>
+          <p:cNvSpPr/>
+          <p:nvPr/>
+        </p:nvSpPr>
+        <p:spPr>
+          <a:xfrm>
+            <a:off x="14173200" y="10332720"/>
+            <a:ext cx="182880" cy="685800"/>
           </a:xfrm>
           <a:prstGeom prst="rect">
             <a:avLst/>
@@ -2962,14 +3080,14 @@
       </p:sp>
       <p:sp>
         <p:nvSpPr>
-          <p:cNvPr id="73" name="TextBox 72"/>
+          <p:cNvPr id="75" name="TextBox 74"/>
           <p:cNvSpPr txBox="1"/>
           <p:nvPr/>
         </p:nvSpPr>
         <p:spPr>
           <a:xfrm>
-            <a:off x="14538960" y="16898112"/>
-            <a:ext cx="13533120" cy="640080"/>
+            <a:off x="14538960" y="10378440"/>
+            <a:ext cx="13441680" cy="594360"/>
           </a:xfrm>
           <a:prstGeom prst="rect">
             <a:avLst/>
@@ -2982,37 +3100,37 @@
           <a:p>
             <a:pPr algn="l"/>
             <a:r>
-              <a:rPr sz="4800" b="1">
+              <a:rPr sz="4400" b="1">
                 <a:solidFill>
                   <a:srgbClr val="FFFFFF"/>
                 </a:solidFill>
                 <a:latin typeface="Arial"/>
               </a:rPr>
-              <a:t>Paper Trading Journal</a:t>
-            </a:r>
-          </a:p>
-        </p:txBody>
-      </p:sp>
-      <p:sp>
-        <p:nvSpPr>
-          <p:cNvPr id="74" name="Rounded Rectangle 73"/>
+              <a:t>Research Notebook</a:t>
+            </a:r>
+          </a:p>
+        </p:txBody>
+      </p:sp>
+      <p:sp>
+        <p:nvSpPr>
+          <p:cNvPr id="76" name="Rounded Rectangle 75"/>
           <p:cNvSpPr/>
           <p:nvPr/>
         </p:nvSpPr>
         <p:spPr>
           <a:xfrm>
-            <a:off x="14173200" y="17693640"/>
+            <a:off x="14173200" y="11155680"/>
             <a:ext cx="13898880" cy="5486400"/>
           </a:xfrm>
           <a:prstGeom prst="roundRect">
             <a:avLst/>
           </a:prstGeom>
           <a:solidFill>
-            <a:srgbClr val="E8E8E8"/>
+            <a:srgbClr val="ECECEC"/>
           </a:solidFill>
-          <a:ln w="25400">
+          <a:ln w="19050">
             <a:solidFill>
-              <a:srgbClr val="666666"/>
+              <a:srgbClr val="AAAAAA"/>
             </a:solidFill>
             <a:prstDash val="dash"/>
           </a:ln>
@@ -3042,79 +3160,13 @@
       </p:sp>
       <p:sp>
         <p:nvSpPr>
-          <p:cNvPr id="75" name="TextBox 74"/>
-          <p:cNvSpPr txBox="1"/>
-          <p:nvPr/>
-        </p:nvSpPr>
-        <p:spPr>
-          <a:xfrm>
-            <a:off x="14173200" y="20025360"/>
-            <a:ext cx="13898880" cy="548640"/>
-          </a:xfrm>
-          <a:prstGeom prst="rect">
-            <a:avLst/>
-          </a:prstGeom>
-          <a:noFill/>
-        </p:spPr>
-        <p:txBody>
-          <a:bodyPr wrap="square"/>
-          <a:lstStyle/>
-          <a:p>
-            <a:pPr algn="ctr"/>
-            <a:r>
-              <a:rPr sz="3600" b="1">
-                <a:solidFill>
-                  <a:srgbClr val="666666"/>
-                </a:solidFill>
-                <a:latin typeface="Arial"/>
-              </a:rPr>
-              <a:t>PAPER TRADING</a:t>
-            </a:r>
-          </a:p>
-        </p:txBody>
-      </p:sp>
-      <p:sp>
-        <p:nvSpPr>
-          <p:cNvPr id="76" name="TextBox 75"/>
-          <p:cNvSpPr txBox="1"/>
-          <p:nvPr/>
-        </p:nvSpPr>
-        <p:spPr>
-          <a:xfrm>
-            <a:off x="14173200" y="20619720"/>
-            <a:ext cx="13898880" cy="457200"/>
-          </a:xfrm>
-          <a:prstGeom prst="rect">
-            <a:avLst/>
-          </a:prstGeom>
-          <a:noFill/>
-        </p:spPr>
-        <p:txBody>
-          <a:bodyPr wrap="square"/>
-          <a:lstStyle/>
-          <a:p>
-            <a:pPr algn="ctr"/>
-            <a:r>
-              <a:rPr sz="2200" b="0">
-                <a:solidFill>
-                  <a:srgbClr val="666666"/>
-                </a:solidFill>
-                <a:latin typeface="Arial"/>
-              </a:rPr>
-              <a:t>Trade grid + decision timeline + regime context</a:t>
-            </a:r>
-          </a:p>
-        </p:txBody>
-      </p:sp>
-      <p:sp>
-        <p:nvSpPr>
           <p:cNvPr id="77" name="TextBox 76"/>
           <p:cNvSpPr txBox="1"/>
           <p:nvPr/>
         </p:nvSpPr>
         <p:spPr>
           <a:xfrm>
-            <a:off x="14173200" y="23545800"/>
+            <a:off x="14173200" y="13487400"/>
             <a:ext cx="13898880" cy="548640"/>
           </a:xfrm>
           <a:prstGeom prst="rect">
@@ -3128,27 +3180,104 @@
           <a:p>
             <a:pPr algn="ctr"/>
             <a:r>
-              <a:rPr sz="2800" b="0">
-                <a:solidFill>
-                  <a:srgbClr val="FFC000"/>
+              <a:rPr sz="3600" b="1">
+                <a:solidFill>
+                  <a:srgbClr val="AAAAAA"/>
                 </a:solidFill>
                 <a:latin typeface="Arial"/>
               </a:rPr>
-              <a:t>15 pages  •  35+ Blazor components  •  Full keyboard navigation</a:t>
-            </a:r>
-          </a:p>
-        </p:txBody>
-      </p:sp>
-      <p:sp>
-        <p:nvSpPr>
-          <p:cNvPr id="78" name="Rectangle 77"/>
+              <a:t>RESEARCH NOTEBOOK</a:t>
+            </a:r>
+          </a:p>
+        </p:txBody>
+      </p:sp>
+      <p:sp>
+        <p:nvSpPr>
+          <p:cNvPr id="78" name="TextBox 77"/>
+          <p:cNvSpPr txBox="1"/>
+          <p:nvPr/>
+        </p:nvSpPr>
+        <p:spPr>
+          <a:xfrm>
+            <a:off x="14173200" y="14081760"/>
+            <a:ext cx="13898880" cy="457200"/>
+          </a:xfrm>
+          <a:prstGeom prst="rect">
+            <a:avLst/>
+          </a:prstGeom>
+          <a:noFill/>
+        </p:spPr>
+        <p:txBody>
+          <a:bodyPr wrap="square"/>
+          <a:lstStyle/>
+          <a:p>
+            <a:pPr algn="ctr"/>
+            <a:r>
+              <a:rPr sz="2200" b="0">
+                <a:solidFill>
+                  <a:srgbClr val="AAAAAA"/>
+                </a:solidFill>
+                <a:latin typeface="Arial"/>
+              </a:rPr>
+              <a:t>KDD process tracking + complexity radar</a:t>
+            </a:r>
+          </a:p>
+        </p:txBody>
+      </p:sp>
+      <p:sp>
+        <p:nvSpPr>
+          <p:cNvPr id="79" name="Rectangle 78"/>
           <p:cNvSpPr/>
           <p:nvPr/>
         </p:nvSpPr>
         <p:spPr>
           <a:xfrm>
-            <a:off x="28620720" y="3200400"/>
-            <a:ext cx="182880" cy="640080"/>
+            <a:off x="14173200" y="17007840"/>
+            <a:ext cx="13898880" cy="685800"/>
+          </a:xfrm>
+          <a:prstGeom prst="rect">
+            <a:avLst/>
+          </a:prstGeom>
+          <a:solidFill>
+            <a:srgbClr val="1A1A1A"/>
+          </a:solidFill>
+          <a:ln>
+            <a:noFill/>
+          </a:ln>
+          <a:effectLst/>
+        </p:spPr>
+        <p:style>
+          <a:lnRef idx="1">
+            <a:schemeClr val="accent1"/>
+          </a:lnRef>
+          <a:fillRef idx="3">
+            <a:schemeClr val="accent1"/>
+          </a:fillRef>
+          <a:effectRef idx="2">
+            <a:schemeClr val="accent1"/>
+          </a:effectRef>
+          <a:fontRef idx="minor">
+            <a:schemeClr val="lt1"/>
+          </a:fontRef>
+        </p:style>
+        <p:txBody>
+          <a:bodyPr rtlCol="0" anchor="ctr"/>
+          <a:lstStyle/>
+          <a:p>
+            <a:pPr algn="ctr"/>
+          </a:p>
+        </p:txBody>
+      </p:sp>
+      <p:sp>
+        <p:nvSpPr>
+          <p:cNvPr id="80" name="Rectangle 79"/>
+          <p:cNvSpPr/>
+          <p:nvPr/>
+        </p:nvSpPr>
+        <p:spPr>
+          <a:xfrm>
+            <a:off x="14173200" y="17007840"/>
+            <a:ext cx="182880" cy="685800"/>
           </a:xfrm>
           <a:prstGeom prst="rect">
             <a:avLst/>
@@ -3185,14 +3314,14 @@
       </p:sp>
       <p:sp>
         <p:nvSpPr>
-          <p:cNvPr id="79" name="TextBox 78"/>
+          <p:cNvPr id="81" name="TextBox 80"/>
           <p:cNvSpPr txBox="1"/>
           <p:nvPr/>
         </p:nvSpPr>
         <p:spPr>
           <a:xfrm>
-            <a:off x="28986480" y="3182112"/>
-            <a:ext cx="13533120" cy="640080"/>
+            <a:off x="14538960" y="17053560"/>
+            <a:ext cx="13441680" cy="594360"/>
           </a:xfrm>
           <a:prstGeom prst="rect">
             <a:avLst/>
@@ -3205,37 +3334,37 @@
           <a:p>
             <a:pPr algn="l"/>
             <a:r>
-              <a:rPr sz="4800" b="1">
+              <a:rPr sz="4400" b="1">
                 <a:solidFill>
                   <a:srgbClr val="FFFFFF"/>
                 </a:solidFill>
                 <a:latin typeface="Arial"/>
               </a:rPr>
-              <a:t>Research Arcade</a:t>
-            </a:r>
-          </a:p>
-        </p:txBody>
-      </p:sp>
-      <p:sp>
-        <p:nvSpPr>
-          <p:cNvPr id="80" name="Rounded Rectangle 79"/>
+              <a:t>Paper Trading Journal</a:t>
+            </a:r>
+          </a:p>
+        </p:txBody>
+      </p:sp>
+      <p:sp>
+        <p:nvSpPr>
+          <p:cNvPr id="82" name="Rounded Rectangle 81"/>
           <p:cNvSpPr/>
           <p:nvPr/>
         </p:nvSpPr>
         <p:spPr>
           <a:xfrm>
-            <a:off x="28620720" y="3977640"/>
-            <a:ext cx="13898880" cy="5029200"/>
+            <a:off x="14173200" y="17830800"/>
+            <a:ext cx="13898880" cy="5486400"/>
           </a:xfrm>
           <a:prstGeom prst="roundRect">
             <a:avLst/>
           </a:prstGeom>
           <a:solidFill>
-            <a:srgbClr val="E8E8E8"/>
+            <a:srgbClr val="ECECEC"/>
           </a:solidFill>
-          <a:ln w="25400">
+          <a:ln w="19050">
             <a:solidFill>
-              <a:srgbClr val="666666"/>
+              <a:srgbClr val="AAAAAA"/>
             </a:solidFill>
             <a:prstDash val="dash"/>
           </a:ln>
@@ -3265,13 +3394,13 @@
       </p:sp>
       <p:sp>
         <p:nvSpPr>
-          <p:cNvPr id="81" name="TextBox 80"/>
+          <p:cNvPr id="83" name="TextBox 82"/>
           <p:cNvSpPr txBox="1"/>
           <p:nvPr/>
         </p:nvSpPr>
         <p:spPr>
           <a:xfrm>
-            <a:off x="28620720" y="6080760"/>
+            <a:off x="14173200" y="20162520"/>
             <a:ext cx="13898880" cy="548640"/>
           </a:xfrm>
           <a:prstGeom prst="rect">
@@ -3287,24 +3416,24 @@
             <a:r>
               <a:rPr sz="3600" b="1">
                 <a:solidFill>
-                  <a:srgbClr val="666666"/>
+                  <a:srgbClr val="AAAAAA"/>
                 </a:solidFill>
                 <a:latin typeface="Arial"/>
               </a:rPr>
-              <a:t>RESEARCH ARCADE</a:t>
-            </a:r>
-          </a:p>
-        </p:txBody>
-      </p:sp>
-      <p:sp>
-        <p:nvSpPr>
-          <p:cNvPr id="82" name="TextBox 81"/>
+              <a:t>PAPER TRADING</a:t>
+            </a:r>
+          </a:p>
+        </p:txBody>
+      </p:sp>
+      <p:sp>
+        <p:nvSpPr>
+          <p:cNvPr id="84" name="TextBox 83"/>
           <p:cNvSpPr txBox="1"/>
           <p:nvPr/>
         </p:nvSpPr>
         <p:spPr>
           <a:xfrm>
-            <a:off x="28620720" y="6675120"/>
+            <a:off x="14173200" y="20756880"/>
             <a:ext cx="13898880" cy="457200"/>
           </a:xfrm>
           <a:prstGeom prst="rect">
@@ -3320,25 +3449,102 @@
             <a:r>
               <a:rPr sz="2200" b="0">
                 <a:solidFill>
-                  <a:srgbClr val="666666"/>
+                  <a:srgbClr val="AAAAAA"/>
                 </a:solidFill>
                 <a:latin typeface="Arial"/>
               </a:rPr>
-              <a:t>Pattern discovery + data pipeline state</a:t>
-            </a:r>
-          </a:p>
-        </p:txBody>
-      </p:sp>
-      <p:sp>
-        <p:nvSpPr>
-          <p:cNvPr id="83" name="Rectangle 82"/>
+              <a:t>Trade grid + decision timeline + regime context</a:t>
+            </a:r>
+          </a:p>
+        </p:txBody>
+      </p:sp>
+      <p:sp>
+        <p:nvSpPr>
+          <p:cNvPr id="85" name="TextBox 84"/>
+          <p:cNvSpPr txBox="1"/>
+          <p:nvPr/>
+        </p:nvSpPr>
+        <p:spPr>
+          <a:xfrm>
+            <a:off x="14173200" y="23682960"/>
+            <a:ext cx="13898880" cy="548640"/>
+          </a:xfrm>
+          <a:prstGeom prst="rect">
+            <a:avLst/>
+          </a:prstGeom>
+          <a:noFill/>
+        </p:spPr>
+        <p:txBody>
+          <a:bodyPr wrap="square"/>
+          <a:lstStyle/>
+          <a:p>
+            <a:pPr algn="ctr"/>
+            <a:r>
+              <a:rPr sz="2800" b="1">
+                <a:solidFill>
+                  <a:srgbClr val="C48E00"/>
+                </a:solidFill>
+                <a:latin typeface="Arial"/>
+              </a:rPr>
+              <a:t>15 pages  •  35+ Blazor components  •  Full keyboard navigation</a:t>
+            </a:r>
+          </a:p>
+        </p:txBody>
+      </p:sp>
+      <p:sp>
+        <p:nvSpPr>
+          <p:cNvPr id="86" name="Rectangle 85"/>
           <p:cNvSpPr/>
           <p:nvPr/>
         </p:nvSpPr>
         <p:spPr>
           <a:xfrm>
-            <a:off x="28620720" y="9372600"/>
-            <a:ext cx="182880" cy="640080"/>
+            <a:off x="28620720" y="3200400"/>
+            <a:ext cx="13898880" cy="685800"/>
+          </a:xfrm>
+          <a:prstGeom prst="rect">
+            <a:avLst/>
+          </a:prstGeom>
+          <a:solidFill>
+            <a:srgbClr val="1A1A1A"/>
+          </a:solidFill>
+          <a:ln>
+            <a:noFill/>
+          </a:ln>
+          <a:effectLst/>
+        </p:spPr>
+        <p:style>
+          <a:lnRef idx="1">
+            <a:schemeClr val="accent1"/>
+          </a:lnRef>
+          <a:fillRef idx="3">
+            <a:schemeClr val="accent1"/>
+          </a:fillRef>
+          <a:effectRef idx="2">
+            <a:schemeClr val="accent1"/>
+          </a:effectRef>
+          <a:fontRef idx="minor">
+            <a:schemeClr val="lt1"/>
+          </a:fontRef>
+        </p:style>
+        <p:txBody>
+          <a:bodyPr rtlCol="0" anchor="ctr"/>
+          <a:lstStyle/>
+          <a:p>
+            <a:pPr algn="ctr"/>
+          </a:p>
+        </p:txBody>
+      </p:sp>
+      <p:sp>
+        <p:nvSpPr>
+          <p:cNvPr id="87" name="Rectangle 86"/>
+          <p:cNvSpPr/>
+          <p:nvPr/>
+        </p:nvSpPr>
+        <p:spPr>
+          <a:xfrm>
+            <a:off x="28620720" y="3200400"/>
+            <a:ext cx="182880" cy="685800"/>
           </a:xfrm>
           <a:prstGeom prst="rect">
             <a:avLst/>
@@ -3375,14 +3581,14 @@
       </p:sp>
       <p:sp>
         <p:nvSpPr>
-          <p:cNvPr id="84" name="TextBox 83"/>
+          <p:cNvPr id="88" name="TextBox 87"/>
           <p:cNvSpPr txBox="1"/>
           <p:nvPr/>
         </p:nvSpPr>
         <p:spPr>
           <a:xfrm>
-            <a:off x="28986480" y="9354312"/>
-            <a:ext cx="13533120" cy="640080"/>
+            <a:off x="28986480" y="3246120"/>
+            <a:ext cx="13441680" cy="594360"/>
           </a:xfrm>
           <a:prstGeom prst="rect">
             <a:avLst/>
@@ -3395,37 +3601,37 @@
           <a:p>
             <a:pPr algn="l"/>
             <a:r>
-              <a:rPr sz="4800" b="1">
+              <a:rPr sz="4400" b="1">
                 <a:solidFill>
                   <a:srgbClr val="FFFFFF"/>
                 </a:solidFill>
                 <a:latin typeface="Arial"/>
               </a:rPr>
-              <a:t>Task Board &amp; CI/CD</a:t>
-            </a:r>
-          </a:p>
-        </p:txBody>
-      </p:sp>
-      <p:sp>
-        <p:nvSpPr>
-          <p:cNvPr id="85" name="Rounded Rectangle 84"/>
+              <a:t>Research Arcade</a:t>
+            </a:r>
+          </a:p>
+        </p:txBody>
+      </p:sp>
+      <p:sp>
+        <p:nvSpPr>
+          <p:cNvPr id="89" name="Rounded Rectangle 88"/>
           <p:cNvSpPr/>
           <p:nvPr/>
         </p:nvSpPr>
         <p:spPr>
           <a:xfrm>
-            <a:off x="28620720" y="10149840"/>
-            <a:ext cx="6766560" cy="5029200"/>
+            <a:off x="28620720" y="4023360"/>
+            <a:ext cx="13898880" cy="5029200"/>
           </a:xfrm>
           <a:prstGeom prst="roundRect">
             <a:avLst/>
           </a:prstGeom>
           <a:solidFill>
-            <a:srgbClr val="E8E8E8"/>
+            <a:srgbClr val="ECECEC"/>
           </a:solidFill>
-          <a:ln w="25400">
+          <a:ln w="19050">
             <a:solidFill>
-              <a:srgbClr val="666666"/>
+              <a:srgbClr val="AAAAAA"/>
             </a:solidFill>
             <a:prstDash val="dash"/>
           </a:ln>
@@ -3455,14 +3661,14 @@
       </p:sp>
       <p:sp>
         <p:nvSpPr>
-          <p:cNvPr id="86" name="TextBox 85"/>
+          <p:cNvPr id="90" name="TextBox 89"/>
           <p:cNvSpPr txBox="1"/>
           <p:nvPr/>
         </p:nvSpPr>
         <p:spPr>
           <a:xfrm>
-            <a:off x="28620720" y="12252960"/>
-            <a:ext cx="6766560" cy="548640"/>
+            <a:off x="28620720" y="6126480"/>
+            <a:ext cx="13898880" cy="548640"/>
           </a:xfrm>
           <a:prstGeom prst="rect">
             <a:avLst/>
@@ -3477,25 +3683,25 @@
             <a:r>
               <a:rPr sz="3600" b="1">
                 <a:solidFill>
-                  <a:srgbClr val="666666"/>
+                  <a:srgbClr val="AAAAAA"/>
                 </a:solidFill>
                 <a:latin typeface="Arial"/>
               </a:rPr>
-              <a:t>TASK BOARD</a:t>
-            </a:r>
-          </a:p>
-        </p:txBody>
-      </p:sp>
-      <p:sp>
-        <p:nvSpPr>
-          <p:cNvPr id="87" name="TextBox 86"/>
+              <a:t>RESEARCH ARCADE</a:t>
+            </a:r>
+          </a:p>
+        </p:txBody>
+      </p:sp>
+      <p:sp>
+        <p:nvSpPr>
+          <p:cNvPr id="91" name="TextBox 90"/>
           <p:cNvSpPr txBox="1"/>
           <p:nvPr/>
         </p:nvSpPr>
         <p:spPr>
           <a:xfrm>
-            <a:off x="28620720" y="12847320"/>
-            <a:ext cx="6766560" cy="457200"/>
+            <a:off x="28620720" y="6720840"/>
+            <a:ext cx="13898880" cy="457200"/>
           </a:xfrm>
           <a:prstGeom prst="rect">
             <a:avLst/>
@@ -3510,37 +3716,34 @@
             <a:r>
               <a:rPr sz="2200" b="0">
                 <a:solidFill>
-                  <a:srgbClr val="666666"/>
+                  <a:srgbClr val="AAAAAA"/>
                 </a:solidFill>
                 <a:latin typeface="Arial"/>
               </a:rPr>
-              <a:t>GitHub Kanban</a:t>
-            </a:r>
-          </a:p>
-        </p:txBody>
-      </p:sp>
-      <p:sp>
-        <p:nvSpPr>
-          <p:cNvPr id="88" name="Rounded Rectangle 87"/>
+              <a:t>Pattern discovery + data pipeline state</a:t>
+            </a:r>
+          </a:p>
+        </p:txBody>
+      </p:sp>
+      <p:sp>
+        <p:nvSpPr>
+          <p:cNvPr id="92" name="Rectangle 91"/>
           <p:cNvSpPr/>
           <p:nvPr/>
         </p:nvSpPr>
         <p:spPr>
           <a:xfrm>
-            <a:off x="35753040" y="10149840"/>
-            <a:ext cx="6766560" cy="5029200"/>
-          </a:xfrm>
-          <a:prstGeom prst="roundRect">
+            <a:off x="28620720" y="9418320"/>
+            <a:ext cx="13898880" cy="685800"/>
+          </a:xfrm>
+          <a:prstGeom prst="rect">
             <a:avLst/>
           </a:prstGeom>
           <a:solidFill>
-            <a:srgbClr val="E8E8E8"/>
+            <a:srgbClr val="1A1A1A"/>
           </a:solidFill>
-          <a:ln w="25400">
-            <a:solidFill>
-              <a:srgbClr val="666666"/>
-            </a:solidFill>
-            <a:prstDash val="dash"/>
+          <a:ln>
+            <a:noFill/>
           </a:ln>
           <a:effectLst/>
         </p:spPr>
@@ -3568,80 +3771,14 @@
       </p:sp>
       <p:sp>
         <p:nvSpPr>
-          <p:cNvPr id="89" name="TextBox 88"/>
-          <p:cNvSpPr txBox="1"/>
-          <p:nvPr/>
-        </p:nvSpPr>
-        <p:spPr>
-          <a:xfrm>
-            <a:off x="35753040" y="12252960"/>
-            <a:ext cx="6766560" cy="548640"/>
-          </a:xfrm>
-          <a:prstGeom prst="rect">
-            <a:avLst/>
-          </a:prstGeom>
-          <a:noFill/>
-        </p:spPr>
-        <p:txBody>
-          <a:bodyPr wrap="square"/>
-          <a:lstStyle/>
-          <a:p>
-            <a:pPr algn="ctr"/>
-            <a:r>
-              <a:rPr sz="3600" b="1">
-                <a:solidFill>
-                  <a:srgbClr val="666666"/>
-                </a:solidFill>
-                <a:latin typeface="Arial"/>
-              </a:rPr>
-              <a:t>CI/CD PIPELINE</a:t>
-            </a:r>
-          </a:p>
-        </p:txBody>
-      </p:sp>
-      <p:sp>
-        <p:nvSpPr>
-          <p:cNvPr id="90" name="TextBox 89"/>
-          <p:cNvSpPr txBox="1"/>
-          <p:nvPr/>
-        </p:nvSpPr>
-        <p:spPr>
-          <a:xfrm>
-            <a:off x="35753040" y="12847320"/>
-            <a:ext cx="6766560" cy="457200"/>
-          </a:xfrm>
-          <a:prstGeom prst="rect">
-            <a:avLst/>
-          </a:prstGeom>
-          <a:noFill/>
-        </p:spPr>
-        <p:txBody>
-          <a:bodyPr wrap="square"/>
-          <a:lstStyle/>
-          <a:p>
-            <a:pPr algn="ctr"/>
-            <a:r>
-              <a:rPr sz="2200" b="0">
-                <a:solidFill>
-                  <a:srgbClr val="666666"/>
-                </a:solidFill>
-                <a:latin typeface="Arial"/>
-              </a:rPr>
-              <a:t>GitHub Actions</a:t>
-            </a:r>
-          </a:p>
-        </p:txBody>
-      </p:sp>
-      <p:sp>
-        <p:nvSpPr>
-          <p:cNvPr id="91" name="Rectangle 90"/>
+          <p:cNvPr id="93" name="Rectangle 92"/>
           <p:cNvSpPr/>
           <p:nvPr/>
         </p:nvSpPr>
         <p:spPr>
           <a:xfrm>
-            <a:off x="28620720" y="15544800"/>
-            <a:ext cx="182880" cy="640080"/>
+            <a:off x="28620720" y="9418320"/>
+            <a:ext cx="182880" cy="685800"/>
           </a:xfrm>
           <a:prstGeom prst="rect">
             <a:avLst/>
@@ -3678,14 +3815,14 @@
       </p:sp>
       <p:sp>
         <p:nvSpPr>
-          <p:cNvPr id="92" name="TextBox 91"/>
+          <p:cNvPr id="94" name="TextBox 93"/>
           <p:cNvSpPr txBox="1"/>
           <p:nvPr/>
         </p:nvSpPr>
         <p:spPr>
           <a:xfrm>
-            <a:off x="28986480" y="15526512"/>
-            <a:ext cx="13533120" cy="640080"/>
+            <a:off x="28986480" y="9464040"/>
+            <a:ext cx="13441680" cy="594360"/>
           </a:xfrm>
           <a:prstGeom prst="rect">
             <a:avLst/>
@@ -3698,37 +3835,37 @@
           <a:p>
             <a:pPr algn="l"/>
             <a:r>
-              <a:rPr sz="4800" b="1">
+              <a:rPr sz="4400" b="1">
                 <a:solidFill>
                   <a:srgbClr val="FFFFFF"/>
                 </a:solidFill>
                 <a:latin typeface="Arial"/>
               </a:rPr>
-              <a:t>Test Infrastructure</a:t>
-            </a:r>
-          </a:p>
-        </p:txBody>
-      </p:sp>
-      <p:sp>
-        <p:nvSpPr>
-          <p:cNvPr id="93" name="Rounded Rectangle 92"/>
+              <a:t>Task Board &amp; CI/CD</a:t>
+            </a:r>
+          </a:p>
+        </p:txBody>
+      </p:sp>
+      <p:sp>
+        <p:nvSpPr>
+          <p:cNvPr id="95" name="Rounded Rectangle 94"/>
           <p:cNvSpPr/>
           <p:nvPr/>
         </p:nvSpPr>
         <p:spPr>
           <a:xfrm>
-            <a:off x="28620720" y="16322040"/>
-            <a:ext cx="6766560" cy="4572000"/>
+            <a:off x="28620720" y="10241280"/>
+            <a:ext cx="6766560" cy="5029200"/>
           </a:xfrm>
           <a:prstGeom prst="roundRect">
             <a:avLst/>
           </a:prstGeom>
           <a:solidFill>
-            <a:srgbClr val="E8E8E8"/>
+            <a:srgbClr val="ECECEC"/>
           </a:solidFill>
-          <a:ln w="25400">
+          <a:ln w="19050">
             <a:solidFill>
-              <a:srgbClr val="666666"/>
+              <a:srgbClr val="AAAAAA"/>
             </a:solidFill>
             <a:prstDash val="dash"/>
           </a:ln>
@@ -3758,13 +3895,13 @@
       </p:sp>
       <p:sp>
         <p:nvSpPr>
-          <p:cNvPr id="94" name="TextBox 93"/>
+          <p:cNvPr id="96" name="TextBox 95"/>
           <p:cNvSpPr txBox="1"/>
           <p:nvPr/>
         </p:nvSpPr>
         <p:spPr>
           <a:xfrm>
-            <a:off x="28620720" y="18196560"/>
+            <a:off x="28620720" y="12344400"/>
             <a:ext cx="6766560" cy="548640"/>
           </a:xfrm>
           <a:prstGeom prst="rect">
@@ -3780,24 +3917,24 @@
             <a:r>
               <a:rPr sz="3600" b="1">
                 <a:solidFill>
-                  <a:srgbClr val="666666"/>
+                  <a:srgbClr val="AAAAAA"/>
                 </a:solidFill>
                 <a:latin typeface="Arial"/>
               </a:rPr>
-              <a:t>TEST RESULTS</a:t>
-            </a:r>
-          </a:p>
-        </p:txBody>
-      </p:sp>
-      <p:sp>
-        <p:nvSpPr>
-          <p:cNvPr id="95" name="TextBox 94"/>
+              <a:t>TASK BOARD</a:t>
+            </a:r>
+          </a:p>
+        </p:txBody>
+      </p:sp>
+      <p:sp>
+        <p:nvSpPr>
+          <p:cNvPr id="97" name="TextBox 96"/>
           <p:cNvSpPr txBox="1"/>
           <p:nvPr/>
         </p:nvSpPr>
         <p:spPr>
           <a:xfrm>
-            <a:off x="28620720" y="18790920"/>
+            <a:off x="28620720" y="12938760"/>
             <a:ext cx="6766560" cy="457200"/>
           </a:xfrm>
           <a:prstGeom prst="rect">
@@ -3813,35 +3950,35 @@
             <a:r>
               <a:rPr sz="2200" b="0">
                 <a:solidFill>
-                  <a:srgbClr val="666666"/>
+                  <a:srgbClr val="AAAAAA"/>
                 </a:solidFill>
                 <a:latin typeface="Arial"/>
               </a:rPr>
-              <a:t>xUnit + Moq + Coverlet</a:t>
-            </a:r>
-          </a:p>
-        </p:txBody>
-      </p:sp>
-      <p:sp>
-        <p:nvSpPr>
-          <p:cNvPr id="96" name="Rounded Rectangle 95"/>
+              <a:t>GitHub Kanban</a:t>
+            </a:r>
+          </a:p>
+        </p:txBody>
+      </p:sp>
+      <p:sp>
+        <p:nvSpPr>
+          <p:cNvPr id="98" name="Rounded Rectangle 97"/>
           <p:cNvSpPr/>
           <p:nvPr/>
         </p:nvSpPr>
         <p:spPr>
           <a:xfrm>
-            <a:off x="35753040" y="16322040"/>
-            <a:ext cx="6766560" cy="4572000"/>
+            <a:off x="35753040" y="10241280"/>
+            <a:ext cx="6766560" cy="5029200"/>
           </a:xfrm>
           <a:prstGeom prst="roundRect">
             <a:avLst/>
           </a:prstGeom>
           <a:solidFill>
-            <a:srgbClr val="E8E8E8"/>
+            <a:srgbClr val="ECECEC"/>
           </a:solidFill>
-          <a:ln w="25400">
+          <a:ln w="19050">
             <a:solidFill>
-              <a:srgbClr val="666666"/>
+              <a:srgbClr val="AAAAAA"/>
             </a:solidFill>
             <a:prstDash val="dash"/>
           </a:ln>
@@ -3871,13 +4008,13 @@
       </p:sp>
       <p:sp>
         <p:nvSpPr>
-          <p:cNvPr id="97" name="TextBox 96"/>
+          <p:cNvPr id="99" name="TextBox 98"/>
           <p:cNvSpPr txBox="1"/>
           <p:nvPr/>
         </p:nvSpPr>
         <p:spPr>
           <a:xfrm>
-            <a:off x="35753040" y="18196560"/>
+            <a:off x="35753040" y="12344400"/>
             <a:ext cx="6766560" cy="548640"/>
           </a:xfrm>
           <a:prstGeom prst="rect">
@@ -3893,24 +4030,24 @@
             <a:r>
               <a:rPr sz="3600" b="1">
                 <a:solidFill>
-                  <a:srgbClr val="666666"/>
+                  <a:srgbClr val="AAAAAA"/>
                 </a:solidFill>
                 <a:latin typeface="Arial"/>
               </a:rPr>
-              <a:t>BACKTEST TRACKER</a:t>
-            </a:r>
-          </a:p>
-        </p:txBody>
-      </p:sp>
-      <p:sp>
-        <p:nvSpPr>
-          <p:cNvPr id="98" name="TextBox 97"/>
+              <a:t>CI/CD PIPELINE</a:t>
+            </a:r>
+          </a:p>
+        </p:txBody>
+      </p:sp>
+      <p:sp>
+        <p:nvSpPr>
+          <p:cNvPr id="100" name="TextBox 99"/>
           <p:cNvSpPr txBox="1"/>
           <p:nvPr/>
         </p:nvSpPr>
         <p:spPr>
           <a:xfrm>
-            <a:off x="35753040" y="18790920"/>
+            <a:off x="35753040" y="12938760"/>
             <a:ext cx="6766560" cy="457200"/>
           </a:xfrm>
           <a:prstGeom prst="rect">
@@ -3926,25 +4063,69 @@
             <a:r>
               <a:rPr sz="2200" b="0">
                 <a:solidFill>
-                  <a:srgbClr val="666666"/>
+                  <a:srgbClr val="AAAAAA"/>
                 </a:solidFill>
                 <a:latin typeface="Arial"/>
               </a:rPr>
-              <a:t>Strategy validation</a:t>
-            </a:r>
-          </a:p>
-        </p:txBody>
-      </p:sp>
-      <p:sp>
-        <p:nvSpPr>
-          <p:cNvPr id="99" name="Rectangle 98"/>
+              <a:t>GitHub Actions</a:t>
+            </a:r>
+          </a:p>
+        </p:txBody>
+      </p:sp>
+      <p:sp>
+        <p:nvSpPr>
+          <p:cNvPr id="101" name="Rectangle 100"/>
           <p:cNvSpPr/>
           <p:nvPr/>
         </p:nvSpPr>
         <p:spPr>
           <a:xfrm>
-            <a:off x="28620720" y="21259800"/>
-            <a:ext cx="182880" cy="640080"/>
+            <a:off x="28620720" y="15636240"/>
+            <a:ext cx="13898880" cy="685800"/>
+          </a:xfrm>
+          <a:prstGeom prst="rect">
+            <a:avLst/>
+          </a:prstGeom>
+          <a:solidFill>
+            <a:srgbClr val="1A1A1A"/>
+          </a:solidFill>
+          <a:ln>
+            <a:noFill/>
+          </a:ln>
+          <a:effectLst/>
+        </p:spPr>
+        <p:style>
+          <a:lnRef idx="1">
+            <a:schemeClr val="accent1"/>
+          </a:lnRef>
+          <a:fillRef idx="3">
+            <a:schemeClr val="accent1"/>
+          </a:fillRef>
+          <a:effectRef idx="2">
+            <a:schemeClr val="accent1"/>
+          </a:effectRef>
+          <a:fontRef idx="minor">
+            <a:schemeClr val="lt1"/>
+          </a:fontRef>
+        </p:style>
+        <p:txBody>
+          <a:bodyPr rtlCol="0" anchor="ctr"/>
+          <a:lstStyle/>
+          <a:p>
+            <a:pPr algn="ctr"/>
+          </a:p>
+        </p:txBody>
+      </p:sp>
+      <p:sp>
+        <p:nvSpPr>
+          <p:cNvPr id="102" name="Rectangle 101"/>
+          <p:cNvSpPr/>
+          <p:nvPr/>
+        </p:nvSpPr>
+        <p:spPr>
+          <a:xfrm>
+            <a:off x="28620720" y="15636240"/>
+            <a:ext cx="182880" cy="685800"/>
           </a:xfrm>
           <a:prstGeom prst="rect">
             <a:avLst/>
@@ -3981,14 +4162,14 @@
       </p:sp>
       <p:sp>
         <p:nvSpPr>
-          <p:cNvPr id="100" name="TextBox 99"/>
+          <p:cNvPr id="103" name="TextBox 102"/>
           <p:cNvSpPr txBox="1"/>
           <p:nvPr/>
         </p:nvSpPr>
         <p:spPr>
           <a:xfrm>
-            <a:off x="28986480" y="21241512"/>
-            <a:ext cx="13533120" cy="640080"/>
+            <a:off x="28986480" y="15681960"/>
+            <a:ext cx="13441680" cy="594360"/>
           </a:xfrm>
           <a:prstGeom prst="rect">
             <a:avLst/>
@@ -4001,12 +4182,359 @@
           <a:p>
             <a:pPr algn="l"/>
             <a:r>
-              <a:rPr sz="4800" b="1">
+              <a:rPr sz="4400" b="1">
                 <a:solidFill>
                   <a:srgbClr val="FFFFFF"/>
                 </a:solidFill>
                 <a:latin typeface="Arial"/>
               </a:rPr>
+              <a:t>Test Infrastructure</a:t>
+            </a:r>
+          </a:p>
+        </p:txBody>
+      </p:sp>
+      <p:sp>
+        <p:nvSpPr>
+          <p:cNvPr id="104" name="Rounded Rectangle 103"/>
+          <p:cNvSpPr/>
+          <p:nvPr/>
+        </p:nvSpPr>
+        <p:spPr>
+          <a:xfrm>
+            <a:off x="28620720" y="16459200"/>
+            <a:ext cx="6766560" cy="4572000"/>
+          </a:xfrm>
+          <a:prstGeom prst="roundRect">
+            <a:avLst/>
+          </a:prstGeom>
+          <a:solidFill>
+            <a:srgbClr val="ECECEC"/>
+          </a:solidFill>
+          <a:ln w="19050">
+            <a:solidFill>
+              <a:srgbClr val="AAAAAA"/>
+            </a:solidFill>
+            <a:prstDash val="dash"/>
+          </a:ln>
+          <a:effectLst/>
+        </p:spPr>
+        <p:style>
+          <a:lnRef idx="1">
+            <a:schemeClr val="accent1"/>
+          </a:lnRef>
+          <a:fillRef idx="3">
+            <a:schemeClr val="accent1"/>
+          </a:fillRef>
+          <a:effectRef idx="2">
+            <a:schemeClr val="accent1"/>
+          </a:effectRef>
+          <a:fontRef idx="minor">
+            <a:schemeClr val="lt1"/>
+          </a:fontRef>
+        </p:style>
+        <p:txBody>
+          <a:bodyPr rtlCol="0" anchor="ctr"/>
+          <a:lstStyle/>
+          <a:p>
+            <a:pPr algn="ctr"/>
+          </a:p>
+        </p:txBody>
+      </p:sp>
+      <p:sp>
+        <p:nvSpPr>
+          <p:cNvPr id="105" name="TextBox 104"/>
+          <p:cNvSpPr txBox="1"/>
+          <p:nvPr/>
+        </p:nvSpPr>
+        <p:spPr>
+          <a:xfrm>
+            <a:off x="28620720" y="18333720"/>
+            <a:ext cx="6766560" cy="548640"/>
+          </a:xfrm>
+          <a:prstGeom prst="rect">
+            <a:avLst/>
+          </a:prstGeom>
+          <a:noFill/>
+        </p:spPr>
+        <p:txBody>
+          <a:bodyPr wrap="square"/>
+          <a:lstStyle/>
+          <a:p>
+            <a:pPr algn="ctr"/>
+            <a:r>
+              <a:rPr sz="3600" b="1">
+                <a:solidFill>
+                  <a:srgbClr val="AAAAAA"/>
+                </a:solidFill>
+                <a:latin typeface="Arial"/>
+              </a:rPr>
+              <a:t>TEST RESULTS</a:t>
+            </a:r>
+          </a:p>
+        </p:txBody>
+      </p:sp>
+      <p:sp>
+        <p:nvSpPr>
+          <p:cNvPr id="106" name="TextBox 105"/>
+          <p:cNvSpPr txBox="1"/>
+          <p:nvPr/>
+        </p:nvSpPr>
+        <p:spPr>
+          <a:xfrm>
+            <a:off x="28620720" y="18928080"/>
+            <a:ext cx="6766560" cy="457200"/>
+          </a:xfrm>
+          <a:prstGeom prst="rect">
+            <a:avLst/>
+          </a:prstGeom>
+          <a:noFill/>
+        </p:spPr>
+        <p:txBody>
+          <a:bodyPr wrap="square"/>
+          <a:lstStyle/>
+          <a:p>
+            <a:pPr algn="ctr"/>
+            <a:r>
+              <a:rPr sz="2200" b="0">
+                <a:solidFill>
+                  <a:srgbClr val="AAAAAA"/>
+                </a:solidFill>
+                <a:latin typeface="Arial"/>
+              </a:rPr>
+              <a:t>xUnit + Moq + Coverlet</a:t>
+            </a:r>
+          </a:p>
+        </p:txBody>
+      </p:sp>
+      <p:sp>
+        <p:nvSpPr>
+          <p:cNvPr id="107" name="Rounded Rectangle 106"/>
+          <p:cNvSpPr/>
+          <p:nvPr/>
+        </p:nvSpPr>
+        <p:spPr>
+          <a:xfrm>
+            <a:off x="35753040" y="16459200"/>
+            <a:ext cx="6766560" cy="4572000"/>
+          </a:xfrm>
+          <a:prstGeom prst="roundRect">
+            <a:avLst/>
+          </a:prstGeom>
+          <a:solidFill>
+            <a:srgbClr val="ECECEC"/>
+          </a:solidFill>
+          <a:ln w="19050">
+            <a:solidFill>
+              <a:srgbClr val="AAAAAA"/>
+            </a:solidFill>
+            <a:prstDash val="dash"/>
+          </a:ln>
+          <a:effectLst/>
+        </p:spPr>
+        <p:style>
+          <a:lnRef idx="1">
+            <a:schemeClr val="accent1"/>
+          </a:lnRef>
+          <a:fillRef idx="3">
+            <a:schemeClr val="accent1"/>
+          </a:fillRef>
+          <a:effectRef idx="2">
+            <a:schemeClr val="accent1"/>
+          </a:effectRef>
+          <a:fontRef idx="minor">
+            <a:schemeClr val="lt1"/>
+          </a:fontRef>
+        </p:style>
+        <p:txBody>
+          <a:bodyPr rtlCol="0" anchor="ctr"/>
+          <a:lstStyle/>
+          <a:p>
+            <a:pPr algn="ctr"/>
+          </a:p>
+        </p:txBody>
+      </p:sp>
+      <p:sp>
+        <p:nvSpPr>
+          <p:cNvPr id="108" name="TextBox 107"/>
+          <p:cNvSpPr txBox="1"/>
+          <p:nvPr/>
+        </p:nvSpPr>
+        <p:spPr>
+          <a:xfrm>
+            <a:off x="35753040" y="18333720"/>
+            <a:ext cx="6766560" cy="548640"/>
+          </a:xfrm>
+          <a:prstGeom prst="rect">
+            <a:avLst/>
+          </a:prstGeom>
+          <a:noFill/>
+        </p:spPr>
+        <p:txBody>
+          <a:bodyPr wrap="square"/>
+          <a:lstStyle/>
+          <a:p>
+            <a:pPr algn="ctr"/>
+            <a:r>
+              <a:rPr sz="3600" b="1">
+                <a:solidFill>
+                  <a:srgbClr val="AAAAAA"/>
+                </a:solidFill>
+                <a:latin typeface="Arial"/>
+              </a:rPr>
+              <a:t>BACKTEST TRACKER</a:t>
+            </a:r>
+          </a:p>
+        </p:txBody>
+      </p:sp>
+      <p:sp>
+        <p:nvSpPr>
+          <p:cNvPr id="109" name="TextBox 108"/>
+          <p:cNvSpPr txBox="1"/>
+          <p:nvPr/>
+        </p:nvSpPr>
+        <p:spPr>
+          <a:xfrm>
+            <a:off x="35753040" y="18928080"/>
+            <a:ext cx="6766560" cy="457200"/>
+          </a:xfrm>
+          <a:prstGeom prst="rect">
+            <a:avLst/>
+          </a:prstGeom>
+          <a:noFill/>
+        </p:spPr>
+        <p:txBody>
+          <a:bodyPr wrap="square"/>
+          <a:lstStyle/>
+          <a:p>
+            <a:pPr algn="ctr"/>
+            <a:r>
+              <a:rPr sz="2200" b="0">
+                <a:solidFill>
+                  <a:srgbClr val="AAAAAA"/>
+                </a:solidFill>
+                <a:latin typeface="Arial"/>
+              </a:rPr>
+              <a:t>Strategy validation</a:t>
+            </a:r>
+          </a:p>
+        </p:txBody>
+      </p:sp>
+      <p:sp>
+        <p:nvSpPr>
+          <p:cNvPr id="110" name="Rectangle 109"/>
+          <p:cNvSpPr/>
+          <p:nvPr/>
+        </p:nvSpPr>
+        <p:spPr>
+          <a:xfrm>
+            <a:off x="28620720" y="21396960"/>
+            <a:ext cx="13898880" cy="685800"/>
+          </a:xfrm>
+          <a:prstGeom prst="rect">
+            <a:avLst/>
+          </a:prstGeom>
+          <a:solidFill>
+            <a:srgbClr val="1A1A1A"/>
+          </a:solidFill>
+          <a:ln>
+            <a:noFill/>
+          </a:ln>
+          <a:effectLst/>
+        </p:spPr>
+        <p:style>
+          <a:lnRef idx="1">
+            <a:schemeClr val="accent1"/>
+          </a:lnRef>
+          <a:fillRef idx="3">
+            <a:schemeClr val="accent1"/>
+          </a:fillRef>
+          <a:effectRef idx="2">
+            <a:schemeClr val="accent1"/>
+          </a:effectRef>
+          <a:fontRef idx="minor">
+            <a:schemeClr val="lt1"/>
+          </a:fontRef>
+        </p:style>
+        <p:txBody>
+          <a:bodyPr rtlCol="0" anchor="ctr"/>
+          <a:lstStyle/>
+          <a:p>
+            <a:pPr algn="ctr"/>
+          </a:p>
+        </p:txBody>
+      </p:sp>
+      <p:sp>
+        <p:nvSpPr>
+          <p:cNvPr id="111" name="Rectangle 110"/>
+          <p:cNvSpPr/>
+          <p:nvPr/>
+        </p:nvSpPr>
+        <p:spPr>
+          <a:xfrm>
+            <a:off x="28620720" y="21396960"/>
+            <a:ext cx="182880" cy="685800"/>
+          </a:xfrm>
+          <a:prstGeom prst="rect">
+            <a:avLst/>
+          </a:prstGeom>
+          <a:solidFill>
+            <a:srgbClr val="FFC000"/>
+          </a:solidFill>
+          <a:ln>
+            <a:noFill/>
+          </a:ln>
+          <a:effectLst/>
+        </p:spPr>
+        <p:style>
+          <a:lnRef idx="1">
+            <a:schemeClr val="accent1"/>
+          </a:lnRef>
+          <a:fillRef idx="3">
+            <a:schemeClr val="accent1"/>
+          </a:fillRef>
+          <a:effectRef idx="2">
+            <a:schemeClr val="accent1"/>
+          </a:effectRef>
+          <a:fontRef idx="minor">
+            <a:schemeClr val="lt1"/>
+          </a:fontRef>
+        </p:style>
+        <p:txBody>
+          <a:bodyPr rtlCol="0" anchor="ctr"/>
+          <a:lstStyle/>
+          <a:p>
+            <a:pPr algn="ctr"/>
+          </a:p>
+        </p:txBody>
+      </p:sp>
+      <p:sp>
+        <p:nvSpPr>
+          <p:cNvPr id="112" name="TextBox 111"/>
+          <p:cNvSpPr txBox="1"/>
+          <p:nvPr/>
+        </p:nvSpPr>
+        <p:spPr>
+          <a:xfrm>
+            <a:off x="28986480" y="21442680"/>
+            <a:ext cx="13441680" cy="594360"/>
+          </a:xfrm>
+          <a:prstGeom prst="rect">
+            <a:avLst/>
+          </a:prstGeom>
+          <a:noFill/>
+        </p:spPr>
+        <p:txBody>
+          <a:bodyPr wrap="square"/>
+          <a:lstStyle/>
+          <a:p>
+            <a:pPr algn="l"/>
+            <a:r>
+              <a:rPr sz="4400" b="1">
+                <a:solidFill>
+                  <a:srgbClr val="FFFFFF"/>
+                </a:solidFill>
+                <a:latin typeface="Arial"/>
+              </a:rPr>
               <a:t>Key Engineering Decisions</a:t>
             </a:r>
           </a:p>
@@ -4014,13 +4542,13 @@
       </p:sp>
       <p:sp>
         <p:nvSpPr>
-          <p:cNvPr id="101" name="TextBox 100"/>
+          <p:cNvPr id="113" name="TextBox 112"/>
           <p:cNvSpPr txBox="1"/>
           <p:nvPr/>
         </p:nvSpPr>
         <p:spPr>
           <a:xfrm>
-            <a:off x="28803600" y="22037040"/>
+            <a:off x="28803600" y="22219920"/>
             <a:ext cx="13533120" cy="2834640"/>
           </a:xfrm>
           <a:prstGeom prst="rect">
@@ -4042,7 +4570,7 @@
             <a:r>
               <a:rPr sz="3000">
                 <a:solidFill>
-                  <a:srgbClr val="FFFFFF"/>
+                  <a:srgbClr val="2D2D2D"/>
                 </a:solidFill>
                 <a:latin typeface="Arial"/>
               </a:rPr>
@@ -4058,7 +4586,7 @@
             <a:r>
               <a:rPr sz="3000">
                 <a:solidFill>
-                  <a:srgbClr val="FFFFFF"/>
+                  <a:srgbClr val="2D2D2D"/>
                 </a:solidFill>
                 <a:latin typeface="Arial"/>
               </a:rPr>
@@ -4074,7 +4602,7 @@
             <a:r>
               <a:rPr sz="3000">
                 <a:solidFill>
-                  <a:srgbClr val="FFFFFF"/>
+                  <a:srgbClr val="2D2D2D"/>
                 </a:solidFill>
                 <a:latin typeface="Arial"/>
               </a:rPr>
@@ -4090,7 +4618,7 @@
             <a:r>
               <a:rPr sz="3000">
                 <a:solidFill>
-                  <a:srgbClr val="FFFFFF"/>
+                  <a:srgbClr val="2D2D2D"/>
                 </a:solidFill>
                 <a:latin typeface="Arial"/>
               </a:rPr>
@@ -4106,7 +4634,7 @@
             <a:r>
               <a:rPr sz="3000">
                 <a:solidFill>
-                  <a:srgbClr val="FFFFFF"/>
+                  <a:srgbClr val="2D2D2D"/>
                 </a:solidFill>
                 <a:latin typeface="Arial"/>
               </a:rPr>
@@ -4117,7 +4645,7 @@
       </p:sp>
       <p:sp>
         <p:nvSpPr>
-          <p:cNvPr id="102" name="Rounded Rectangle 101"/>
+          <p:cNvPr id="114" name="Rounded Rectangle 113"/>
           <p:cNvSpPr/>
           <p:nvPr/>
         </p:nvSpPr>
@@ -4130,11 +4658,11 @@
             <a:avLst/>
           </a:prstGeom>
           <a:solidFill>
-            <a:srgbClr val="E8E8E8"/>
+            <a:srgbClr val="ECECEC"/>
           </a:solidFill>
-          <a:ln w="25400">
+          <a:ln w="19050">
             <a:solidFill>
-              <a:srgbClr val="666666"/>
+              <a:srgbClr val="AAAAAA"/>
             </a:solidFill>
             <a:prstDash val="dash"/>
           </a:ln>
@@ -4164,7 +4692,7 @@
       </p:sp>
       <p:sp>
         <p:nvSpPr>
-          <p:cNvPr id="103" name="TextBox 102"/>
+          <p:cNvPr id="115" name="TextBox 114"/>
           <p:cNvSpPr txBox="1"/>
           <p:nvPr/>
         </p:nvSpPr>
@@ -4186,7 +4714,7 @@
             <a:r>
               <a:rPr sz="3600" b="1">
                 <a:solidFill>
-                  <a:srgbClr val="666666"/>
+                  <a:srgbClr val="AAAAAA"/>
                 </a:solidFill>
                 <a:latin typeface="Arial"/>
               </a:rPr>
@@ -4197,7 +4725,7 @@
       </p:sp>
       <p:sp>
         <p:nvSpPr>
-          <p:cNvPr id="104" name="TextBox 103"/>
+          <p:cNvPr id="116" name="TextBox 115"/>
           <p:cNvSpPr txBox="1"/>
           <p:nvPr/>
         </p:nvSpPr>
@@ -4219,7 +4747,7 @@
             <a:r>
               <a:rPr sz="2200" b="0">
                 <a:solidFill>
-                  <a:srgbClr val="666666"/>
+                  <a:srgbClr val="AAAAAA"/>
                 </a:solidFill>
                 <a:latin typeface="Arial"/>
               </a:rPr>
